--- a/brightstar/docs/BrightStar_受託開発ケーススタディ.pptx
+++ b/brightstar/docs/BrightStar_受託開発ケーススタディ.pptx
@@ -12309,7 +12309,7 @@
                 <a:ea typeface="Meiryo"/>
                 <a:cs typeface="Meiryo"/>
               </a:rPr>
-              <a:t>「微信で完結する社内研修アシスタント」を、サーバーレス＋生成AIでフルスクラッチ開発。受講管理・多言語対応・AI問答・自動リマインドを、固定費ほぼゼロの構成で実現しました。</a:t>
+              <a:t>「微信・LINE で完結する社内研修アシスタント」を、サーバーレス＋生成AIでフルスクラッチ開発。共通バックエンドをマルチチャネル展開し、受講管理・多言語対応・AI問答・自動リマインドを固定費ほぼゼロで実現しました。</a:t>
             </a:r>
           </a:p>
         </p:txBody>
@@ -12906,7 +12906,7 @@
                 <a:ea typeface="Yu Gothic UI"/>
                 <a:cs typeface="Yu Gothic UI"/>
               </a:rPr>
-              <a:t>3</a:t>
+              <a:t>4</a:t>
             </a:r>
           </a:p>
         </p:txBody>
@@ -13186,7 +13186,7 @@
                 <a:ea typeface="Yu Gothic UI"/>
                 <a:cs typeface="Yu Gothic UI"/>
               </a:rPr>
-              <a:t>2</a:t>
+              <a:t>微信+LINE</a:t>
             </a:r>
           </a:p>
         </p:txBody>
@@ -13233,7 +13233,7 @@
                 <a:ea typeface="Meiryo"/>
                 <a:cs typeface="Meiryo"/>
               </a:rPr>
-              <a:t>IaC 方式 (SAM / CDK)</a:t>
+              <a:t>対応チャネル</a:t>
             </a:r>
           </a:p>
         </p:txBody>
@@ -13326,7 +13326,7 @@
                 <a:ea typeface="Yu Gothic UI"/>
                 <a:cs typeface="Yu Gothic UI"/>
               </a:rPr>
-              <a:t>¥0.5</a:t>
+              <a:t>約0.5円</a:t>
             </a:r>
           </a:p>
         </p:txBody>
@@ -13373,7 +13373,7 @@
                 <a:ea typeface="Meiryo"/>
                 <a:cs typeface="Meiryo"/>
               </a:rPr>
-              <a:t>AI 1問あたり概算</a:t>
+              <a:t>AI 1問あたり(概算)</a:t>
             </a:r>
           </a:p>
         </p:txBody>
@@ -15325,7 +15325,7 @@
                 <a:ea typeface="Meiryo"/>
                 <a:cs typeface="Meiryo"/>
               </a:rPr>
-              <a:t>言語選択→氏名登録</a:t>
+              <a:t>微信/LINE 対応・言語選択→登録</a:t>
             </a:r>
           </a:p>
         </p:txBody>
@@ -15598,7 +15598,7 @@
                 <a:ea typeface="Meiryo"/>
                 <a:cs typeface="Meiryo"/>
               </a:rPr>
-              <a:t>AI問答(任意ON)</a:t>
+              <a:t>AI問答／アカウント連携</a:t>
             </a:r>
           </a:p>
         </p:txBody>
@@ -17167,7 +17167,7 @@
                 <a:ea typeface="Yu Gothic UI"/>
                 <a:cs typeface="Yu Gothic UI"/>
               </a:rPr>
-              <a:t>微信 / 企業微信</a:t>
+              <a:t>微信/LINE/企業微信</a:t>
             </a:r>
           </a:p>
           <a:p>
@@ -17604,7 +17604,7 @@
                 <a:ea typeface="Meiryo"/>
                 <a:cs typeface="Meiryo"/>
               </a:rPr>
-              <a:t>webhook / web / reminder</a:t>
+              <a:t>webhook / line / web / reminder</a:t>
             </a:r>
           </a:p>
         </p:txBody>
@@ -18234,7 +18234,7 @@
                 <a:ea typeface="Meiryo"/>
                 <a:cs typeface="Meiryo"/>
               </a:rPr>
-              <a:t>・全リソースに統一タグ → コスト可視化・一括削除が容易</a:t>
+              <a:t>・ルーティング層をチャネル非依存に設計 → LINE は署名検証のみで同一バックエンドに接続(中継/暗号なし)、提醒は連携済み全チャネルへ配信</a:t>
             </a:r>
           </a:p>
         </p:txBody>
@@ -19738,7 +19738,7 @@
                 <a:ea typeface="Meiryo"/>
                 <a:cs typeface="Meiryo"/>
               </a:rPr>
-              <a:t>開講1時間前に申込者へ自動通知</a:t>
+              <a:t>開講1時間前に自動通知（微信・LINE 両対応）</a:t>
             </a:r>
           </a:p>
         </p:txBody>
